--- a/deck/初賽簡報_v3.2.pptx
+++ b/deck/初賽簡報_v3.2.pptx
@@ -39653,7 +39653,7 @@
                 <a:spcPct val="100000"/>
               </a:lnSpc>
               <a:spcBef>
-                <a:spcPts val="0"/>
+                <a:spcPts val="847"/>
               </a:spcBef>
               <a:spcAft>
                 <a:spcPts val="200"/>
@@ -39861,7 +39861,7 @@
                 <a:spcPct val="100000"/>
               </a:lnSpc>
               <a:spcBef>
-                <a:spcPts val="0"/>
+                <a:spcPts val="847"/>
               </a:spcBef>
               <a:spcAft>
                 <a:spcPts val="200"/>
@@ -40069,7 +40069,7 @@
                 <a:spcPct val="100000"/>
               </a:lnSpc>
               <a:spcBef>
-                <a:spcPts val="0"/>
+                <a:spcPts val="847"/>
               </a:spcBef>
               <a:spcAft>
                 <a:spcPts val="200"/>
@@ -40509,7 +40509,7 @@
                 <a:spcPct val="100000"/>
               </a:lnSpc>
               <a:spcBef>
-                <a:spcPts val="0"/>
+                <a:spcPts val="847"/>
               </a:spcBef>
               <a:spcAft>
                 <a:spcPts val="200"/>
@@ -41993,7 +41993,7 @@
                 <a:spcPct val="100000"/>
               </a:lnSpc>
               <a:spcBef>
-                <a:spcPts val="0"/>
+                <a:spcPts val="847"/>
               </a:spcBef>
               <a:spcAft>
                 <a:spcPts val="200"/>
@@ -42367,7 +42367,7 @@
                 <a:spcPct val="100000"/>
               </a:lnSpc>
               <a:spcBef>
-                <a:spcPts val="0"/>
+                <a:spcPts val="847"/>
               </a:spcBef>
               <a:spcAft>
                 <a:spcPts val="200"/>
@@ -42575,7 +42575,7 @@
                 <a:spcPct val="100000"/>
               </a:lnSpc>
               <a:spcBef>
-                <a:spcPts val="0"/>
+                <a:spcPts val="847"/>
               </a:spcBef>
               <a:spcAft>
                 <a:spcPts val="200"/>
@@ -42882,7 +42882,7 @@
           <a:noFill/>
         </p:spPr>
         <p:txBody>
-          <a:bodyPr wrap="square" lIns="36576" rIns="36576" tIns="18288" bIns="18288" anchor="t">
+          <a:bodyPr wrap="square" lIns="36576" rIns="36576" tIns="18288" bIns="18288" anchor="ctr">
             <a:spAutoFit/>
           </a:bodyPr>
           <a:lstStyle/>
@@ -43105,7 +43105,7 @@
                 <a:spcPct val="100000"/>
               </a:lnSpc>
               <a:spcBef>
-                <a:spcPts val="0"/>
+                <a:spcPts val="847"/>
               </a:spcBef>
               <a:spcAft>
                 <a:spcPts val="200"/>
@@ -43283,7 +43283,7 @@
                 <a:spcPct val="100000"/>
               </a:lnSpc>
               <a:spcBef>
-                <a:spcPts val="0"/>
+                <a:spcPts val="847"/>
               </a:spcBef>
               <a:spcAft>
                 <a:spcPts val="200"/>
@@ -43381,7 +43381,7 @@
           <a:noFill/>
         </p:spPr>
         <p:txBody>
-          <a:bodyPr wrap="square" lIns="36576" rIns="36576" tIns="18288" bIns="18288" anchor="t">
+          <a:bodyPr wrap="square" lIns="36576" rIns="36576" tIns="18288" bIns="18288" anchor="ctr">
             <a:spAutoFit/>
           </a:bodyPr>
           <a:lstStyle/>
